--- a/satellite_monitoring.pptx
+++ b/satellite_monitoring.pptx
@@ -4,6 +4,9 @@
   <p:sldMasterIdLst>
     <p:sldMasterId id="2147483648" r:id="rId1"/>
   </p:sldMasterIdLst>
+  <p:notesMasterIdLst>
+    <p:notesMasterId r:id="rId9"/>
+  </p:notesMasterIdLst>
   <p:sldIdLst>
     <p:sldId id="256" r:id="rId2"/>
     <p:sldId id="257" r:id="rId3"/>
@@ -13,10 +16,7 @@
     <p:sldId id="261" r:id="rId7"/>
     <p:sldId id="262" r:id="rId8"/>
   </p:sldIdLst>
-  <p:notesMasterIdLst>
-    <p:notesMasterId r:id="rId9"/>
-  </p:notesMasterIdLst>
-  <p:sldSz cx="9144000" cy="5143500"/>
+  <p:sldSz cx="9144000" cy="5143500" type="screen16x9"/>
   <p:notesSz cx="5143500" cy="9144000"/>
   <p:defaultTextStyle>
     <a:lvl1pPr marL="0" algn="l" defTabSz="914400" rtl="0" eaLnBrk="1" latinLnBrk="0" hangingPunct="1">
@@ -110,6 +110,11 @@
       </a:defRPr>
     </a:lvl9pPr>
   </p:defaultTextStyle>
+  <p:extLst>
+    <p:ext uri="{EFAFB233-063F-42B5-8137-9DF3F51BA10A}">
+      <p15:sldGuideLst xmlns:p15="http://schemas.microsoft.com/office/powerpoint/2012/main"/>
+    </p:ext>
+  </p:extLst>
 </p:presentation>
 </file>
 
@@ -135,234 +140,10 @@
           <a:chExt cx="0" cy="0"/>
         </a:xfrm>
       </p:grpSpPr>
-      <p:sp>
-        <p:nvSpPr>
-          <p:cNvPr id="2" name="Header Placeholder 1"/>
-          <p:cNvSpPr>
-            <a:spLocks noGrp="1"/>
-          </p:cNvSpPr>
-          <p:nvPr>
-            <p:ph type="hdr" sz="quarter"/>
-          </p:nvPr>
-        </p:nvSpPr>
-        <p:spPr>
-          <a:xfrm>
-            <a:off x="0" y="0"/>
-            <a:ext cx="2971800" cy="458788"/>
-          </a:xfrm>
-          <a:prstGeom prst="rect">
-            <a:avLst/>
-          </a:prstGeom>
-        </p:spPr>
-        <p:txBody>
-          <a:bodyPr vert="horz" lIns="91440" tIns="45720" rIns="91440" bIns="45720" rtlCol="0"/>
-          <a:lstStyle>
-            <a:lvl1pPr algn="l">
-              <a:defRPr sz="1200"/>
-            </a:lvl1pPr>
-          </a:lstStyle>
-          <a:p>
-            <a:endParaRPr lang="en-US"/>
-          </a:p>
-        </p:txBody>
-      </p:sp>
-      <p:sp>
-        <p:nvSpPr>
-          <p:cNvPr id="3" name="Date Placeholder 2"/>
-          <p:cNvSpPr>
-            <a:spLocks noGrp="1"/>
-          </p:cNvSpPr>
-          <p:nvPr>
-            <p:ph type="dt" idx="1"/>
-          </p:nvPr>
-        </p:nvSpPr>
-        <p:spPr>
-          <a:xfrm>
-            <a:off x="3884613" y="0"/>
-            <a:ext cx="2971800" cy="458788"/>
-          </a:xfrm>
-          <a:prstGeom prst="rect">
-            <a:avLst/>
-          </a:prstGeom>
-        </p:spPr>
-        <p:txBody>
-          <a:bodyPr vert="horz" lIns="91440" tIns="45720" rIns="91440" bIns="45720" rtlCol="0"/>
-          <a:lstStyle>
-            <a:lvl1pPr algn="r">
-              <a:defRPr sz="1200"/>
-            </a:lvl1pPr>
-          </a:lstStyle>
-          <a:p>
-            <a:fld id="{5282F153-3F37-0F45-9E97-73ACFA13230C}" type="datetimeFigureOut">
-              <a:rPr lang="en-US"/>
-              <a:t>7/23/19</a:t>
-            </a:fld>
-            <a:endParaRPr lang="en-US"/>
-          </a:p>
-        </p:txBody>
-      </p:sp>
-      <p:sp>
-        <p:nvSpPr>
-          <p:cNvPr id="4" name="Slide Image Placeholder 3"/>
-          <p:cNvSpPr>
-            <a:spLocks noGrp="1" noRot="1" noChangeAspect="1"/>
-          </p:cNvSpPr>
-          <p:nvPr>
-            <p:ph type="sldImg" idx="2"/>
-          </p:nvPr>
-        </p:nvSpPr>
-        <p:spPr>
-          <a:xfrm>
-            <a:off x="685800" y="1143000"/>
-            <a:ext cx="5486400" cy="3086100"/>
-          </a:xfrm>
-          <a:prstGeom prst="rect">
-            <a:avLst/>
-          </a:prstGeom>
-          <a:noFill/>
-          <a:ln w="12700">
-            <a:solidFill>
-              <a:prstClr val="black"/>
-            </a:solidFill>
-          </a:ln>
-        </p:spPr>
-        <p:txBody>
-          <a:bodyPr vert="horz" lIns="91440" tIns="45720" rIns="91440" bIns="45720" rtlCol="0" anchor="ctr"/>
-          <a:lstStyle/>
-          <a:p>
-            <a:endParaRPr lang="en-US"/>
-          </a:p>
-        </p:txBody>
-      </p:sp>
-      <p:sp>
-        <p:nvSpPr>
-          <p:cNvPr id="5" name="Notes Placeholder 4"/>
-          <p:cNvSpPr>
-            <a:spLocks noGrp="1"/>
-          </p:cNvSpPr>
-          <p:nvPr>
-            <p:ph type="body" sz="quarter" idx="3"/>
-          </p:nvPr>
-        </p:nvSpPr>
-        <p:spPr>
-          <a:xfrm>
-            <a:off x="685800" y="4400550"/>
-            <a:ext cx="5486400" cy="3600450"/>
-          </a:xfrm>
-          <a:prstGeom prst="rect">
-            <a:avLst/>
-          </a:prstGeom>
-        </p:spPr>
-        <p:txBody>
-          <a:bodyPr vert="horz" lIns="91440" tIns="45720" rIns="91440" bIns="45720" rtlCol="0"/>
-          <a:lstStyle/>
-          <a:p>
-            <a:pPr lvl="0"/>
-            <a:r>
-              <a:rPr lang="en-US"/>
-              <a:t>Click to edit Master text styles</a:t>
-            </a:r>
-          </a:p>
-          <a:p>
-            <a:pPr lvl="1"/>
-            <a:r>
-              <a:rPr lang="en-US"/>
-              <a:t>Second level</a:t>
-            </a:r>
-          </a:p>
-          <a:p>
-            <a:pPr lvl="2"/>
-            <a:r>
-              <a:rPr lang="en-US"/>
-              <a:t>Third level</a:t>
-            </a:r>
-          </a:p>
-          <a:p>
-            <a:pPr lvl="3"/>
-            <a:r>
-              <a:rPr lang="en-US"/>
-              <a:t>Fourth level</a:t>
-            </a:r>
-          </a:p>
-          <a:p>
-            <a:pPr lvl="4"/>
-            <a:r>
-              <a:rPr lang="en-US"/>
-              <a:t>Fifth level</a:t>
-            </a:r>
-          </a:p>
-        </p:txBody>
-      </p:sp>
-      <p:sp>
-        <p:nvSpPr>
-          <p:cNvPr id="6" name="Footer Placeholder 5"/>
-          <p:cNvSpPr>
-            <a:spLocks noGrp="1"/>
-          </p:cNvSpPr>
-          <p:nvPr>
-            <p:ph type="ftr" sz="quarter" idx="4"/>
-          </p:nvPr>
-        </p:nvSpPr>
-        <p:spPr>
-          <a:xfrm>
-            <a:off x="0" y="8685213"/>
-            <a:ext cx="2971800" cy="458787"/>
-          </a:xfrm>
-          <a:prstGeom prst="rect">
-            <a:avLst/>
-          </a:prstGeom>
-        </p:spPr>
-        <p:txBody>
-          <a:bodyPr vert="horz" lIns="91440" tIns="45720" rIns="91440" bIns="45720" rtlCol="0" anchor="b"/>
-          <a:lstStyle>
-            <a:lvl1pPr algn="l">
-              <a:defRPr sz="1200"/>
-            </a:lvl1pPr>
-          </a:lstStyle>
-          <a:p>
-            <a:endParaRPr lang="en-US"/>
-          </a:p>
-        </p:txBody>
-      </p:sp>
-      <p:sp>
-        <p:nvSpPr>
-          <p:cNvPr id="7" name="Slide Number Placeholder 6"/>
-          <p:cNvSpPr>
-            <a:spLocks noGrp="1"/>
-          </p:cNvSpPr>
-          <p:nvPr>
-            <p:ph type="sldNum" sz="quarter" idx="5"/>
-          </p:nvPr>
-        </p:nvSpPr>
-        <p:spPr>
-          <a:xfrm>
-            <a:off x="3884613" y="8685213"/>
-            <a:ext cx="2971800" cy="458787"/>
-          </a:xfrm>
-          <a:prstGeom prst="rect">
-            <a:avLst/>
-          </a:prstGeom>
-        </p:spPr>
-        <p:txBody>
-          <a:bodyPr vert="horz" lIns="91440" tIns="45720" rIns="91440" bIns="45720" rtlCol="0" anchor="b"/>
-          <a:lstStyle>
-            <a:lvl1pPr algn="r">
-              <a:defRPr sz="1200"/>
-            </a:lvl1pPr>
-          </a:lstStyle>
-          <a:p>
-            <a:fld id="{CE5E9CC1-C706-0F49-92D6-E571CC5EEA8F}" type="slidenum">
-              <a:rPr lang="en-US"/>
-              <a:t>‹#›</a:t>
-            </a:fld>
-            <a:endParaRPr lang="en-US"/>
-          </a:p>
-        </p:txBody>
-      </p:sp>
     </p:spTree>
     <p:extLst>
       <p:ext uri="{BB962C8B-B14F-4D97-AF65-F5344CB8AC3E}">
-        <p14:creationId xmlns:p14="http://schemas.microsoft.com/office/powerpoint/2010/main" val="1024086991"/>
+        <p14:creationId xmlns:p14="http://schemas.microsoft.com/office/powerpoint/2010/main" val="705221645"/>
       </p:ext>
     </p:extLst>
   </p:cSld>
@@ -506,10 +287,6 @@
           <a:bodyPr/>
           <a:lstStyle/>
           <a:p>
-            <a:r>
-              <a:rPr lang="en-US" dirty="0"/>
-              <a:t/>
-            </a:r>
             <a:endParaRPr lang="en-US" dirty="0"/>
           </a:p>
         </p:txBody>
@@ -594,10 +371,6 @@
           <a:bodyPr/>
           <a:lstStyle/>
           <a:p>
-            <a:r>
-              <a:rPr lang="en-US" dirty="0"/>
-              <a:t/>
-            </a:r>
             <a:endParaRPr lang="en-US" dirty="0"/>
           </a:p>
         </p:txBody>
@@ -682,10 +455,6 @@
           <a:bodyPr/>
           <a:lstStyle/>
           <a:p>
-            <a:r>
-              <a:rPr lang="en-US" dirty="0"/>
-              <a:t/>
-            </a:r>
             <a:endParaRPr lang="en-US" dirty="0"/>
           </a:p>
         </p:txBody>
@@ -770,10 +539,6 @@
           <a:bodyPr/>
           <a:lstStyle/>
           <a:p>
-            <a:r>
-              <a:rPr lang="en-US" dirty="0"/>
-              <a:t/>
-            </a:r>
             <a:endParaRPr lang="en-US" dirty="0"/>
           </a:p>
         </p:txBody>
@@ -858,10 +623,6 @@
           <a:bodyPr/>
           <a:lstStyle/>
           <a:p>
-            <a:r>
-              <a:rPr lang="en-US" dirty="0"/>
-              <a:t/>
-            </a:r>
             <a:endParaRPr lang="en-US" dirty="0"/>
           </a:p>
         </p:txBody>
@@ -946,10 +707,6 @@
           <a:bodyPr/>
           <a:lstStyle/>
           <a:p>
-            <a:r>
-              <a:rPr lang="en-US" dirty="0"/>
-              <a:t/>
-            </a:r>
             <a:endParaRPr lang="en-US" dirty="0"/>
           </a:p>
         </p:txBody>
@@ -1034,10 +791,6 @@
           <a:bodyPr/>
           <a:lstStyle/>
           <a:p>
-            <a:r>
-              <a:rPr lang="en-US" dirty="0"/>
-              <a:t/>
-            </a:r>
             <a:endParaRPr lang="en-US" dirty="0"/>
           </a:p>
         </p:txBody>
@@ -1111,6 +864,11 @@
 <file path=ppt/slideMasters/slideMaster1.xml><?xml version="1.0" encoding="utf-8"?>
 <p:sldMaster xmlns:a="http://schemas.openxmlformats.org/drawingml/2006/main" xmlns:r="http://schemas.openxmlformats.org/officeDocument/2006/relationships" xmlns:p="http://schemas.openxmlformats.org/presentationml/2006/main">
   <p:cSld>
+    <p:bg>
+      <p:bgRef idx="1001">
+        <a:schemeClr val="bg1"/>
+      </p:bgRef>
+    </p:bg>
     <p:spTree>
       <p:nvGrpSpPr>
         <p:cNvPr id="1" name=""/>
@@ -1393,6 +1151,7 @@
         <a:solidFill>
           <a:srgbClr val="0A0E1A"/>
         </a:solidFill>
+        <a:effectLst/>
       </p:bgPr>
     </p:bg>
     <p:spTree>
@@ -1586,7 +1345,7 @@
           <a:bodyPr wrap="square" lIns="0" tIns="0" rIns="0" bIns="0" rtlCol="0" anchor="ctr"/>
           <a:lstStyle/>
           <a:p>
-            <a:pPr algn="ctr" indent="0" marL="0">
+            <a:pPr marL="0" indent="0" algn="ctr">
               <a:buNone/>
             </a:pPr>
             <a:r>
@@ -1622,7 +1381,7 @@
           <a:bodyPr wrap="square" lIns="0" tIns="0" rIns="0" bIns="0" rtlCol="0" anchor="ctr"/>
           <a:lstStyle/>
           <a:p>
-            <a:pPr indent="0" marL="0">
+            <a:pPr marL="0" indent="0">
               <a:buNone/>
             </a:pPr>
             <a:r>
@@ -1661,7 +1420,7 @@
           <a:bodyPr wrap="square" lIns="0" tIns="0" rIns="0" bIns="0" rtlCol="0" anchor="ctr"/>
           <a:lstStyle/>
           <a:p>
-            <a:pPr indent="0" marL="0">
+            <a:pPr marL="0" indent="0">
               <a:buNone/>
             </a:pPr>
             <a:r>
@@ -1700,7 +1459,7 @@
           <a:bodyPr wrap="square" lIns="0" tIns="0" rIns="0" bIns="0" rtlCol="0" anchor="ctr"/>
           <a:lstStyle/>
           <a:p>
-            <a:pPr indent="0" marL="0">
+            <a:pPr marL="0" indent="0">
               <a:buNone/>
             </a:pPr>
             <a:r>
@@ -1717,7 +1476,7 @@
             <a:endParaRPr lang="en-US" sz="1400" dirty="0"/>
           </a:p>
           <a:p>
-            <a:pPr indent="0" marL="0">
+            <a:pPr marL="0" indent="0">
               <a:buNone/>
             </a:pPr>
             <a:r>
@@ -1781,7 +1540,7 @@
           <a:bodyPr wrap="square" lIns="0" tIns="0" rIns="0" bIns="0" rtlCol="0" anchor="ctr"/>
           <a:lstStyle/>
           <a:p>
-            <a:pPr algn="ctr" indent="0" marL="0">
+            <a:pPr marL="0" indent="0" algn="ctr">
               <a:buNone/>
             </a:pPr>
             <a:r>
@@ -1812,6 +1571,7 @@
         <a:solidFill>
           <a:srgbClr val="0A0E1A"/>
         </a:solidFill>
+        <a:effectLst/>
       </p:bgPr>
     </p:bg>
     <p:spTree>
@@ -1874,7 +1634,7 @@
           <a:bodyPr wrap="square" lIns="0" tIns="0" rIns="0" bIns="0" rtlCol="0" anchor="ctr"/>
           <a:lstStyle/>
           <a:p>
-            <a:pPr indent="0" marL="0">
+            <a:pPr marL="0" indent="0">
               <a:buNone/>
             </a:pPr>
             <a:r>
@@ -1940,7 +1700,7 @@
           <a:bodyPr wrap="square" lIns="0" tIns="0" rIns="0" bIns="0" rtlCol="0" anchor="ctr"/>
           <a:lstStyle/>
           <a:p>
-            <a:pPr indent="0" marL="0">
+            <a:pPr marL="0" indent="0">
               <a:buNone/>
             </a:pPr>
             <a:r>
@@ -2004,7 +1764,7 @@
           <a:bodyPr wrap="square" lIns="0" tIns="0" rIns="0" bIns="0" rtlCol="0" anchor="ctr"/>
           <a:lstStyle/>
           <a:p>
-            <a:pPr algn="ctr" indent="0" marL="0">
+            <a:pPr marL="0" indent="0" algn="ctr">
               <a:buNone/>
             </a:pPr>
             <a:r>
@@ -2040,7 +1800,7 @@
           <a:bodyPr wrap="square" lIns="0" tIns="0" rIns="0" bIns="0" rtlCol="0" anchor="ctr"/>
           <a:lstStyle/>
           <a:p>
-            <a:pPr indent="0" marL="0">
+            <a:pPr marL="0" indent="0">
               <a:buNone/>
             </a:pPr>
             <a:r>
@@ -2079,7 +1839,7 @@
           <a:bodyPr wrap="square" lIns="0" tIns="0" rIns="0" bIns="0" rtlCol="0" anchor="ctr"/>
           <a:lstStyle/>
           <a:p>
-            <a:pPr indent="0" marL="0">
+            <a:pPr marL="0" indent="0">
               <a:buNone/>
             </a:pPr>
             <a:r>
@@ -2143,7 +1903,7 @@
           <a:bodyPr wrap="square" lIns="0" tIns="0" rIns="0" bIns="0" rtlCol="0" anchor="ctr"/>
           <a:lstStyle/>
           <a:p>
-            <a:pPr algn="ctr" indent="0" marL="0">
+            <a:pPr marL="0" indent="0" algn="ctr">
               <a:buNone/>
             </a:pPr>
             <a:r>
@@ -2179,7 +1939,7 @@
           <a:bodyPr wrap="square" lIns="0" tIns="0" rIns="0" bIns="0" rtlCol="0" anchor="ctr"/>
           <a:lstStyle/>
           <a:p>
-            <a:pPr indent="0" marL="0">
+            <a:pPr marL="0" indent="0">
               <a:buNone/>
             </a:pPr>
             <a:r>
@@ -2218,7 +1978,7 @@
           <a:bodyPr wrap="square" lIns="0" tIns="0" rIns="0" bIns="0" rtlCol="0" anchor="ctr"/>
           <a:lstStyle/>
           <a:p>
-            <a:pPr indent="0" marL="0">
+            <a:pPr marL="0" indent="0">
               <a:buNone/>
             </a:pPr>
             <a:r>
@@ -2282,7 +2042,7 @@
           <a:bodyPr wrap="square" lIns="0" tIns="0" rIns="0" bIns="0" rtlCol="0" anchor="ctr"/>
           <a:lstStyle/>
           <a:p>
-            <a:pPr algn="ctr" indent="0" marL="0">
+            <a:pPr marL="0" indent="0" algn="ctr">
               <a:buNone/>
             </a:pPr>
             <a:r>
@@ -2318,7 +2078,7 @@
           <a:bodyPr wrap="square" lIns="0" tIns="0" rIns="0" bIns="0" rtlCol="0" anchor="ctr"/>
           <a:lstStyle/>
           <a:p>
-            <a:pPr indent="0" marL="0">
+            <a:pPr marL="0" indent="0">
               <a:buNone/>
             </a:pPr>
             <a:r>
@@ -2357,7 +2117,7 @@
           <a:bodyPr wrap="square" lIns="0" tIns="0" rIns="0" bIns="0" rtlCol="0" anchor="ctr"/>
           <a:lstStyle/>
           <a:p>
-            <a:pPr indent="0" marL="0">
+            <a:pPr marL="0" indent="0">
               <a:buNone/>
             </a:pPr>
             <a:r>
@@ -2421,7 +2181,7 @@
           <a:bodyPr wrap="square" lIns="0" tIns="0" rIns="0" bIns="0" rtlCol="0" anchor="ctr"/>
           <a:lstStyle/>
           <a:p>
-            <a:pPr algn="ctr" indent="0" marL="0">
+            <a:pPr marL="0" indent="0" algn="ctr">
               <a:buNone/>
             </a:pPr>
             <a:r>
@@ -2457,7 +2217,7 @@
           <a:bodyPr wrap="square" lIns="0" tIns="0" rIns="0" bIns="0" rtlCol="0" anchor="ctr"/>
           <a:lstStyle/>
           <a:p>
-            <a:pPr indent="0" marL="0">
+            <a:pPr marL="0" indent="0">
               <a:buNone/>
             </a:pPr>
             <a:r>
@@ -2496,7 +2256,7 @@
           <a:bodyPr wrap="square" lIns="0" tIns="0" rIns="0" bIns="0" rtlCol="0" anchor="ctr"/>
           <a:lstStyle/>
           <a:p>
-            <a:pPr indent="0" marL="0">
+            <a:pPr marL="0" indent="0">
               <a:buNone/>
             </a:pPr>
             <a:r>
@@ -2560,7 +2320,7 @@
           <a:bodyPr wrap="square" lIns="0" tIns="0" rIns="0" bIns="0" rtlCol="0" anchor="ctr"/>
           <a:lstStyle/>
           <a:p>
-            <a:pPr algn="ctr" indent="0" marL="0">
+            <a:pPr marL="0" indent="0" algn="ctr">
               <a:buNone/>
             </a:pPr>
             <a:r>
@@ -2596,7 +2356,7 @@
           <a:bodyPr wrap="square" lIns="0" tIns="0" rIns="0" bIns="0" rtlCol="0" anchor="ctr"/>
           <a:lstStyle/>
           <a:p>
-            <a:pPr indent="0" marL="0">
+            <a:pPr marL="0" indent="0">
               <a:buNone/>
             </a:pPr>
             <a:r>
@@ -2635,7 +2395,7 @@
           <a:bodyPr wrap="square" lIns="0" tIns="0" rIns="0" bIns="0" rtlCol="0" anchor="ctr"/>
           <a:lstStyle/>
           <a:p>
-            <a:pPr indent="0" marL="0">
+            <a:pPr marL="0" indent="0">
               <a:buNone/>
             </a:pPr>
             <a:r>
@@ -2699,7 +2459,7 @@
           <a:bodyPr wrap="square" lIns="0" tIns="0" rIns="0" bIns="0" rtlCol="0" anchor="ctr"/>
           <a:lstStyle/>
           <a:p>
-            <a:pPr algn="ctr" indent="0" marL="0">
+            <a:pPr marL="0" indent="0" algn="ctr">
               <a:buNone/>
             </a:pPr>
             <a:r>
@@ -2735,7 +2495,7 @@
           <a:bodyPr wrap="square" lIns="0" tIns="0" rIns="0" bIns="0" rtlCol="0" anchor="ctr"/>
           <a:lstStyle/>
           <a:p>
-            <a:pPr indent="0" marL="0">
+            <a:pPr marL="0" indent="0">
               <a:buNone/>
             </a:pPr>
             <a:r>
@@ -2774,7 +2534,7 @@
           <a:bodyPr wrap="square" lIns="0" tIns="0" rIns="0" bIns="0" rtlCol="0" anchor="ctr"/>
           <a:lstStyle/>
           <a:p>
-            <a:pPr indent="0" marL="0">
+            <a:pPr marL="0" indent="0">
               <a:buNone/>
             </a:pPr>
             <a:r>
@@ -2808,6 +2568,7 @@
         <a:solidFill>
           <a:srgbClr val="0A0E1A"/>
         </a:solidFill>
+        <a:effectLst/>
       </p:bgPr>
     </p:bg>
     <p:spTree>
@@ -2870,7 +2631,7 @@
           <a:bodyPr wrap="square" lIns="0" tIns="0" rIns="0" bIns="0" rtlCol="0" anchor="ctr"/>
           <a:lstStyle/>
           <a:p>
-            <a:pPr indent="0" marL="0">
+            <a:pPr marL="0" indent="0">
               <a:buNone/>
             </a:pPr>
             <a:r>
@@ -2912,7 +2673,7 @@
             <a:prstDash val="solid"/>
           </a:ln>
           <a:effectLst>
-            <a:outerShdw sx="100000" sy="100000" kx="0" ky="0" algn="bl" rotWithShape="0" blurRad="101600" dist="25400" dir="8100000">
+            <a:outerShdw blurRad="101600" dist="25400" dir="8100000" algn="bl" rotWithShape="0">
               <a:srgbClr val="000000">
                 <a:alpha val="30000"/>
               </a:srgbClr>
@@ -2966,11 +2727,11 @@
           <a:bodyPr wrap="square" lIns="0" tIns="0" rIns="0" bIns="0" rtlCol="0" anchor="ctr"/>
           <a:lstStyle/>
           <a:p>
-            <a:pPr algn="ctr" indent="0" marL="0">
-              <a:buNone/>
-            </a:pPr>
-            <a:r>
-              <a:rPr lang="en-US" sz="1200" b="1" spc="200" kern="0" dirty="0">
+            <a:pPr marL="0" indent="0" algn="ctr">
+              <a:buNone/>
+            </a:pPr>
+            <a:r>
+              <a:rPr lang="en-US" sz="1200" b="1" kern="0" spc="200" dirty="0">
                 <a:solidFill>
                   <a:srgbClr val="0A0E1A"/>
                 </a:solidFill>
@@ -3030,7 +2791,7 @@
           <a:bodyPr wrap="square" lIns="0" tIns="0" rIns="0" bIns="0" rtlCol="0" anchor="ctr"/>
           <a:lstStyle/>
           <a:p>
-            <a:pPr algn="ctr" indent="0" marL="0">
+            <a:pPr marL="0" indent="0" algn="ctr">
               <a:buNone/>
             </a:pPr>
             <a:r>
@@ -3094,7 +2855,7 @@
           <a:bodyPr wrap="square" lIns="0" tIns="0" rIns="0" bIns="0" rtlCol="0" anchor="ctr"/>
           <a:lstStyle/>
           <a:p>
-            <a:pPr algn="ctr" indent="0" marL="0">
+            <a:pPr marL="0" indent="0" algn="ctr">
               <a:buNone/>
             </a:pPr>
             <a:r>
@@ -3158,7 +2919,7 @@
           <a:bodyPr wrap="square" lIns="0" tIns="0" rIns="0" bIns="0" rtlCol="0" anchor="ctr"/>
           <a:lstStyle/>
           <a:p>
-            <a:pPr algn="ctr" indent="0" marL="0">
+            <a:pPr marL="0" indent="0" algn="ctr">
               <a:buNone/>
             </a:pPr>
             <a:r>
@@ -3222,7 +2983,7 @@
           <a:bodyPr wrap="square" lIns="0" tIns="0" rIns="0" bIns="0" rtlCol="0" anchor="ctr"/>
           <a:lstStyle/>
           <a:p>
-            <a:pPr algn="ctr" indent="0" marL="0">
+            <a:pPr marL="0" indent="0" algn="ctr">
               <a:buNone/>
             </a:pPr>
             <a:r>
@@ -3264,7 +3025,7 @@
             <a:prstDash val="solid"/>
           </a:ln>
           <a:effectLst>
-            <a:outerShdw sx="100000" sy="100000" kx="0" ky="0" algn="bl" rotWithShape="0" blurRad="101600" dist="25400" dir="8100000">
+            <a:outerShdw blurRad="101600" dist="25400" dir="8100000" algn="bl" rotWithShape="0">
               <a:srgbClr val="000000">
                 <a:alpha val="30000"/>
               </a:srgbClr>
@@ -3318,11 +3079,11 @@
           <a:bodyPr wrap="square" lIns="0" tIns="0" rIns="0" bIns="0" rtlCol="0" anchor="ctr"/>
           <a:lstStyle/>
           <a:p>
-            <a:pPr algn="ctr" indent="0" marL="0">
-              <a:buNone/>
-            </a:pPr>
-            <a:r>
-              <a:rPr lang="en-US" sz="1200" b="1" spc="200" kern="0" dirty="0">
+            <a:pPr marL="0" indent="0" algn="ctr">
+              <a:buNone/>
+            </a:pPr>
+            <a:r>
+              <a:rPr lang="en-US" sz="1200" b="1" kern="0" spc="200" dirty="0">
                 <a:solidFill>
                   <a:srgbClr val="0A0E1A"/>
                 </a:solidFill>
@@ -3382,7 +3143,7 @@
           <a:bodyPr wrap="square" lIns="0" tIns="0" rIns="0" bIns="0" rtlCol="0" anchor="ctr"/>
           <a:lstStyle/>
           <a:p>
-            <a:pPr algn="ctr" indent="0" marL="0">
+            <a:pPr marL="0" indent="0" algn="ctr">
               <a:buNone/>
             </a:pPr>
             <a:r>
@@ -3446,7 +3207,7 @@
           <a:bodyPr wrap="square" lIns="0" tIns="0" rIns="0" bIns="0" rtlCol="0" anchor="ctr"/>
           <a:lstStyle/>
           <a:p>
-            <a:pPr algn="ctr" indent="0" marL="0">
+            <a:pPr marL="0" indent="0" algn="ctr">
               <a:buNone/>
             </a:pPr>
             <a:r>
@@ -3510,7 +3271,7 @@
           <a:bodyPr wrap="square" lIns="0" tIns="0" rIns="0" bIns="0" rtlCol="0" anchor="ctr"/>
           <a:lstStyle/>
           <a:p>
-            <a:pPr algn="ctr" indent="0" marL="0">
+            <a:pPr marL="0" indent="0" algn="ctr">
               <a:buNone/>
             </a:pPr>
             <a:r>
@@ -3574,7 +3335,7 @@
           <a:bodyPr wrap="square" lIns="0" tIns="0" rIns="0" bIns="0" rtlCol="0" anchor="ctr"/>
           <a:lstStyle/>
           <a:p>
-            <a:pPr algn="ctr" indent="0" marL="0">
+            <a:pPr marL="0" indent="0" algn="ctr">
               <a:buNone/>
             </a:pPr>
             <a:r>
@@ -3616,7 +3377,7 @@
             <a:prstDash val="solid"/>
           </a:ln>
           <a:effectLst>
-            <a:outerShdw sx="100000" sy="100000" kx="0" ky="0" algn="bl" rotWithShape="0" blurRad="101600" dist="25400" dir="8100000">
+            <a:outerShdw blurRad="101600" dist="25400" dir="8100000" algn="bl" rotWithShape="0">
               <a:srgbClr val="000000">
                 <a:alpha val="30000"/>
               </a:srgbClr>
@@ -3670,11 +3431,11 @@
           <a:bodyPr wrap="square" lIns="0" tIns="0" rIns="0" bIns="0" rtlCol="0" anchor="ctr"/>
           <a:lstStyle/>
           <a:p>
-            <a:pPr algn="ctr" indent="0" marL="0">
-              <a:buNone/>
-            </a:pPr>
-            <a:r>
-              <a:rPr lang="en-US" sz="1200" b="1" spc="200" kern="0" dirty="0">
+            <a:pPr marL="0" indent="0" algn="ctr">
+              <a:buNone/>
+            </a:pPr>
+            <a:r>
+              <a:rPr lang="en-US" sz="1200" b="1" kern="0" spc="200" dirty="0">
                 <a:solidFill>
                   <a:srgbClr val="0A0E1A"/>
                 </a:solidFill>
@@ -3734,7 +3495,7 @@
           <a:bodyPr wrap="square" lIns="0" tIns="0" rIns="0" bIns="0" rtlCol="0" anchor="ctr"/>
           <a:lstStyle/>
           <a:p>
-            <a:pPr algn="ctr" indent="0" marL="0">
+            <a:pPr marL="0" indent="0" algn="ctr">
               <a:buNone/>
             </a:pPr>
             <a:r>
@@ -3798,7 +3559,7 @@
           <a:bodyPr wrap="square" lIns="0" tIns="0" rIns="0" bIns="0" rtlCol="0" anchor="ctr"/>
           <a:lstStyle/>
           <a:p>
-            <a:pPr algn="ctr" indent="0" marL="0">
+            <a:pPr marL="0" indent="0" algn="ctr">
               <a:buNone/>
             </a:pPr>
             <a:r>
@@ -3862,7 +3623,7 @@
           <a:bodyPr wrap="square" lIns="0" tIns="0" rIns="0" bIns="0" rtlCol="0" anchor="ctr"/>
           <a:lstStyle/>
           <a:p>
-            <a:pPr algn="ctr" indent="0" marL="0">
+            <a:pPr marL="0" indent="0" algn="ctr">
               <a:buNone/>
             </a:pPr>
             <a:r>
@@ -3926,7 +3687,7 @@
           <a:bodyPr wrap="square" lIns="0" tIns="0" rIns="0" bIns="0" rtlCol="0" anchor="ctr"/>
           <a:lstStyle/>
           <a:p>
-            <a:pPr algn="ctr" indent="0" marL="0">
+            <a:pPr marL="0" indent="0" algn="ctr">
               <a:buNone/>
             </a:pPr>
             <a:r>
@@ -4011,7 +3772,7 @@
           <a:bodyPr wrap="square" lIns="0" tIns="0" rIns="0" bIns="0" rtlCol="0" anchor="ctr"/>
           <a:lstStyle/>
           <a:p>
-            <a:pPr algn="ctr" indent="0" marL="0">
+            <a:pPr marL="0" indent="0" algn="ctr">
               <a:buNone/>
             </a:pPr>
             <a:r>
@@ -4047,7 +3808,7 @@
           <a:bodyPr wrap="square" lIns="0" tIns="0" rIns="0" bIns="0" rtlCol="0" anchor="ctr"/>
           <a:lstStyle/>
           <a:p>
-            <a:pPr algn="ctr" indent="0" marL="0">
+            <a:pPr marL="0" indent="0" algn="ctr">
               <a:buNone/>
             </a:pPr>
             <a:r>
@@ -4078,6 +3839,7 @@
         <a:solidFill>
           <a:srgbClr val="0A0E1A"/>
         </a:solidFill>
+        <a:effectLst/>
       </p:bgPr>
     </p:bg>
     <p:spTree>
@@ -4140,7 +3902,7 @@
           <a:bodyPr wrap="square" lIns="0" tIns="0" rIns="0" bIns="0" rtlCol="0" anchor="ctr"/>
           <a:lstStyle/>
           <a:p>
-            <a:pPr indent="0" marL="0">
+            <a:pPr marL="0" indent="0">
               <a:buNone/>
             </a:pPr>
             <a:r>
@@ -4256,7 +4018,7 @@
           <a:bodyPr wrap="square" lIns="0" tIns="0" rIns="0" bIns="0" rtlCol="0" anchor="ctr"/>
           <a:lstStyle/>
           <a:p>
-            <a:pPr algn="ctr" indent="0" marL="0">
+            <a:pPr marL="0" indent="0" algn="ctr">
               <a:buNone/>
             </a:pPr>
             <a:r>
@@ -4292,7 +4054,7 @@
           <a:bodyPr wrap="square" lIns="0" tIns="0" rIns="0" bIns="0" rtlCol="0" anchor="ctr"/>
           <a:lstStyle/>
           <a:p>
-            <a:pPr indent="0" marL="0">
+            <a:pPr marL="0" indent="0">
               <a:buNone/>
             </a:pPr>
             <a:r>
@@ -4331,7 +4093,7 @@
           <a:bodyPr wrap="square" lIns="0" tIns="0" rIns="0" bIns="0" rtlCol="0" anchor="ctr"/>
           <a:lstStyle/>
           <a:p>
-            <a:pPr indent="0" marL="0">
+            <a:pPr marL="0" indent="0">
               <a:buNone/>
             </a:pPr>
             <a:r>
@@ -4447,7 +4209,7 @@
           <a:bodyPr wrap="square" lIns="0" tIns="0" rIns="0" bIns="0" rtlCol="0" anchor="ctr"/>
           <a:lstStyle/>
           <a:p>
-            <a:pPr algn="ctr" indent="0" marL="0">
+            <a:pPr marL="0" indent="0" algn="ctr">
               <a:buNone/>
             </a:pPr>
             <a:r>
@@ -4483,7 +4245,7 @@
           <a:bodyPr wrap="square" lIns="0" tIns="0" rIns="0" bIns="0" rtlCol="0" anchor="ctr"/>
           <a:lstStyle/>
           <a:p>
-            <a:pPr indent="0" marL="0">
+            <a:pPr marL="0" indent="0">
               <a:buNone/>
             </a:pPr>
             <a:r>
@@ -4522,7 +4284,7 @@
           <a:bodyPr wrap="square" lIns="0" tIns="0" rIns="0" bIns="0" rtlCol="0" anchor="ctr"/>
           <a:lstStyle/>
           <a:p>
-            <a:pPr indent="0" marL="0">
+            <a:pPr marL="0" indent="0">
               <a:buNone/>
             </a:pPr>
             <a:r>
@@ -4638,7 +4400,7 @@
           <a:bodyPr wrap="square" lIns="0" tIns="0" rIns="0" bIns="0" rtlCol="0" anchor="ctr"/>
           <a:lstStyle/>
           <a:p>
-            <a:pPr algn="ctr" indent="0" marL="0">
+            <a:pPr marL="0" indent="0" algn="ctr">
               <a:buNone/>
             </a:pPr>
             <a:r>
@@ -4674,7 +4436,7 @@
           <a:bodyPr wrap="square" lIns="0" tIns="0" rIns="0" bIns="0" rtlCol="0" anchor="ctr"/>
           <a:lstStyle/>
           <a:p>
-            <a:pPr indent="0" marL="0">
+            <a:pPr marL="0" indent="0">
               <a:buNone/>
             </a:pPr>
             <a:r>
@@ -4713,7 +4475,7 @@
           <a:bodyPr wrap="square" lIns="0" tIns="0" rIns="0" bIns="0" rtlCol="0" anchor="ctr"/>
           <a:lstStyle/>
           <a:p>
-            <a:pPr indent="0" marL="0">
+            <a:pPr marL="0" indent="0">
               <a:buNone/>
             </a:pPr>
             <a:r>
@@ -4829,7 +4591,7 @@
           <a:bodyPr wrap="square" lIns="0" tIns="0" rIns="0" bIns="0" rtlCol="0" anchor="ctr"/>
           <a:lstStyle/>
           <a:p>
-            <a:pPr algn="ctr" indent="0" marL="0">
+            <a:pPr marL="0" indent="0" algn="ctr">
               <a:buNone/>
             </a:pPr>
             <a:r>
@@ -4865,7 +4627,7 @@
           <a:bodyPr wrap="square" lIns="0" tIns="0" rIns="0" bIns="0" rtlCol="0" anchor="ctr"/>
           <a:lstStyle/>
           <a:p>
-            <a:pPr indent="0" marL="0">
+            <a:pPr marL="0" indent="0">
               <a:buNone/>
             </a:pPr>
             <a:r>
@@ -4904,7 +4666,7 @@
           <a:bodyPr wrap="square" lIns="0" tIns="0" rIns="0" bIns="0" rtlCol="0" anchor="ctr"/>
           <a:lstStyle/>
           <a:p>
-            <a:pPr indent="0" marL="0">
+            <a:pPr marL="0" indent="0">
               <a:buNone/>
             </a:pPr>
             <a:r>
@@ -5020,7 +4782,7 @@
           <a:bodyPr wrap="square" lIns="0" tIns="0" rIns="0" bIns="0" rtlCol="0" anchor="ctr"/>
           <a:lstStyle/>
           <a:p>
-            <a:pPr algn="ctr" indent="0" marL="0">
+            <a:pPr marL="0" indent="0" algn="ctr">
               <a:buNone/>
             </a:pPr>
             <a:r>
@@ -5056,7 +4818,7 @@
           <a:bodyPr wrap="square" lIns="0" tIns="0" rIns="0" bIns="0" rtlCol="0" anchor="ctr"/>
           <a:lstStyle/>
           <a:p>
-            <a:pPr indent="0" marL="0">
+            <a:pPr marL="0" indent="0">
               <a:buNone/>
             </a:pPr>
             <a:r>
@@ -5095,7 +4857,7 @@
           <a:bodyPr wrap="square" lIns="0" tIns="0" rIns="0" bIns="0" rtlCol="0" anchor="ctr"/>
           <a:lstStyle/>
           <a:p>
-            <a:pPr indent="0" marL="0">
+            <a:pPr marL="0" indent="0">
               <a:buNone/>
             </a:pPr>
             <a:r>
@@ -5211,7 +4973,7 @@
           <a:bodyPr wrap="square" lIns="0" tIns="0" rIns="0" bIns="0" rtlCol="0" anchor="ctr"/>
           <a:lstStyle/>
           <a:p>
-            <a:pPr algn="ctr" indent="0" marL="0">
+            <a:pPr marL="0" indent="0" algn="ctr">
               <a:buNone/>
             </a:pPr>
             <a:r>
@@ -5247,7 +5009,7 @@
           <a:bodyPr wrap="square" lIns="0" tIns="0" rIns="0" bIns="0" rtlCol="0" anchor="ctr"/>
           <a:lstStyle/>
           <a:p>
-            <a:pPr indent="0" marL="0">
+            <a:pPr marL="0" indent="0">
               <a:buNone/>
             </a:pPr>
             <a:r>
@@ -5286,7 +5048,7 @@
           <a:bodyPr wrap="square" lIns="0" tIns="0" rIns="0" bIns="0" rtlCol="0" anchor="ctr"/>
           <a:lstStyle/>
           <a:p>
-            <a:pPr indent="0" marL="0">
+            <a:pPr marL="0" indent="0">
               <a:buNone/>
             </a:pPr>
             <a:r>
@@ -5320,6 +5082,7 @@
         <a:solidFill>
           <a:srgbClr val="0A0E1A"/>
         </a:solidFill>
+        <a:effectLst/>
       </p:bgPr>
     </p:bg>
     <p:spTree>
@@ -5382,7 +5145,7 @@
           <a:bodyPr wrap="square" lIns="0" tIns="0" rIns="0" bIns="0" rtlCol="0" anchor="ctr"/>
           <a:lstStyle/>
           <a:p>
-            <a:pPr indent="0" marL="0">
+            <a:pPr marL="0" indent="0">
               <a:buNone/>
             </a:pPr>
             <a:r>
@@ -5446,11 +5209,11 @@
           <a:bodyPr wrap="square" lIns="0" tIns="0" rIns="0" bIns="0" rtlCol="0" anchor="ctr"/>
           <a:lstStyle/>
           <a:p>
-            <a:pPr algn="ctr" indent="0" marL="0">
-              <a:buNone/>
-            </a:pPr>
-            <a:r>
-              <a:rPr lang="en-US" sz="800" b="1" spc="200" kern="0" dirty="0">
+            <a:pPr marL="0" indent="0" algn="ctr">
+              <a:buNone/>
+            </a:pPr>
+            <a:r>
+              <a:rPr lang="en-US" sz="800" b="1" kern="0" spc="200" dirty="0">
                 <a:solidFill>
                   <a:srgbClr val="0A0E1A"/>
                 </a:solidFill>
@@ -5507,7 +5270,7 @@
           <a:bodyPr wrap="square" lIns="0" tIns="0" rIns="0" bIns="0" rtlCol="0" anchor="ctr"/>
           <a:lstStyle/>
           <a:p>
-            <a:pPr algn="ctr" indent="0" marL="0">
+            <a:pPr marL="0" indent="0" algn="ctr">
               <a:buNone/>
             </a:pPr>
             <a:r>
@@ -5543,7 +5306,7 @@
           <a:bodyPr wrap="square" lIns="0" tIns="0" rIns="0" bIns="0" rtlCol="0" anchor="ctr"/>
           <a:lstStyle/>
           <a:p>
-            <a:pPr indent="0" marL="0">
+            <a:pPr marL="0" indent="0">
               <a:buNone/>
             </a:pPr>
             <a:r>
@@ -5582,7 +5345,7 @@
           <a:bodyPr wrap="square" lIns="0" tIns="0" rIns="0" bIns="0" rtlCol="0" anchor="ctr"/>
           <a:lstStyle/>
           <a:p>
-            <a:pPr indent="0" marL="0">
+            <a:pPr marL="0" indent="0">
               <a:buNone/>
             </a:pPr>
             <a:r>
@@ -5646,7 +5409,7 @@
           <a:bodyPr wrap="square" lIns="0" tIns="0" rIns="0" bIns="0" rtlCol="0" anchor="ctr"/>
           <a:lstStyle/>
           <a:p>
-            <a:pPr algn="ctr" indent="0" marL="0">
+            <a:pPr marL="0" indent="0" algn="ctr">
               <a:buNone/>
             </a:pPr>
             <a:r>
@@ -5682,7 +5445,7 @@
           <a:bodyPr wrap="square" lIns="0" tIns="0" rIns="0" bIns="0" rtlCol="0" anchor="ctr"/>
           <a:lstStyle/>
           <a:p>
-            <a:pPr indent="0" marL="0">
+            <a:pPr marL="0" indent="0">
               <a:buNone/>
             </a:pPr>
             <a:r>
@@ -5721,7 +5484,7 @@
           <a:bodyPr wrap="square" lIns="0" tIns="0" rIns="0" bIns="0" rtlCol="0" anchor="ctr"/>
           <a:lstStyle/>
           <a:p>
-            <a:pPr indent="0" marL="0">
+            <a:pPr marL="0" indent="0">
               <a:buNone/>
             </a:pPr>
             <a:r>
@@ -5785,7 +5548,7 @@
           <a:bodyPr wrap="square" lIns="0" tIns="0" rIns="0" bIns="0" rtlCol="0" anchor="ctr"/>
           <a:lstStyle/>
           <a:p>
-            <a:pPr algn="ctr" indent="0" marL="0">
+            <a:pPr marL="0" indent="0" algn="ctr">
               <a:buNone/>
             </a:pPr>
             <a:r>
@@ -5821,7 +5584,7 @@
           <a:bodyPr wrap="square" lIns="0" tIns="0" rIns="0" bIns="0" rtlCol="0" anchor="ctr"/>
           <a:lstStyle/>
           <a:p>
-            <a:pPr indent="0" marL="0">
+            <a:pPr marL="0" indent="0">
               <a:buNone/>
             </a:pPr>
             <a:r>
@@ -5860,7 +5623,7 @@
           <a:bodyPr wrap="square" lIns="0" tIns="0" rIns="0" bIns="0" rtlCol="0" anchor="ctr"/>
           <a:lstStyle/>
           <a:p>
-            <a:pPr indent="0" marL="0">
+            <a:pPr marL="0" indent="0">
               <a:buNone/>
             </a:pPr>
             <a:r>
@@ -5924,7 +5687,7 @@
           <a:bodyPr wrap="square" lIns="0" tIns="0" rIns="0" bIns="0" rtlCol="0" anchor="ctr"/>
           <a:lstStyle/>
           <a:p>
-            <a:pPr algn="ctr" indent="0" marL="0">
+            <a:pPr marL="0" indent="0" algn="ctr">
               <a:buNone/>
             </a:pPr>
             <a:r>
@@ -5960,7 +5723,7 @@
           <a:bodyPr wrap="square" lIns="0" tIns="0" rIns="0" bIns="0" rtlCol="0" anchor="ctr"/>
           <a:lstStyle/>
           <a:p>
-            <a:pPr indent="0" marL="0">
+            <a:pPr marL="0" indent="0">
               <a:buNone/>
             </a:pPr>
             <a:r>
@@ -5999,7 +5762,7 @@
           <a:bodyPr wrap="square" lIns="0" tIns="0" rIns="0" bIns="0" rtlCol="0" anchor="ctr"/>
           <a:lstStyle/>
           <a:p>
-            <a:pPr indent="0" marL="0">
+            <a:pPr marL="0" indent="0">
               <a:buNone/>
             </a:pPr>
             <a:r>
@@ -6063,7 +5826,7 @@
           <a:bodyPr wrap="square" lIns="0" tIns="0" rIns="0" bIns="0" rtlCol="0" anchor="ctr"/>
           <a:lstStyle/>
           <a:p>
-            <a:pPr algn="ctr" indent="0" marL="0">
+            <a:pPr marL="0" indent="0" algn="ctr">
               <a:buNone/>
             </a:pPr>
             <a:r>
@@ -6099,7 +5862,7 @@
           <a:bodyPr wrap="square" lIns="0" tIns="0" rIns="0" bIns="0" rtlCol="0" anchor="ctr"/>
           <a:lstStyle/>
           <a:p>
-            <a:pPr indent="0" marL="0">
+            <a:pPr marL="0" indent="0">
               <a:buNone/>
             </a:pPr>
             <a:r>
@@ -6138,7 +5901,7 @@
           <a:bodyPr wrap="square" lIns="0" tIns="0" rIns="0" bIns="0" rtlCol="0" anchor="ctr"/>
           <a:lstStyle/>
           <a:p>
-            <a:pPr indent="0" marL="0">
+            <a:pPr marL="0" indent="0">
               <a:buNone/>
             </a:pPr>
             <a:r>
@@ -6177,7 +5940,7 @@
           <a:bodyPr wrap="square" lIns="0" tIns="0" rIns="0" bIns="0" rtlCol="0" anchor="ctr"/>
           <a:lstStyle/>
           <a:p>
-            <a:pPr indent="0" marL="0">
+            <a:pPr marL="0" indent="0">
               <a:buNone/>
             </a:pPr>
             <a:r>
@@ -6240,7 +6003,7 @@
           <a:bodyPr wrap="square" lIns="0" tIns="0" rIns="0" bIns="0" rtlCol="0" anchor="ctr"/>
           <a:lstStyle/>
           <a:p>
-            <a:pPr algn="ctr" indent="0" marL="0">
+            <a:pPr marL="0" indent="0" algn="ctr">
               <a:buNone/>
             </a:pPr>
             <a:r>
@@ -6303,7 +6066,7 @@
           <a:bodyPr wrap="square" lIns="0" tIns="0" rIns="0" bIns="0" rtlCol="0" anchor="ctr"/>
           <a:lstStyle/>
           <a:p>
-            <a:pPr algn="ctr" indent="0" marL="0">
+            <a:pPr marL="0" indent="0" algn="ctr">
               <a:buNone/>
             </a:pPr>
             <a:r>
@@ -6366,7 +6129,7 @@
           <a:bodyPr wrap="square" lIns="0" tIns="0" rIns="0" bIns="0" rtlCol="0" anchor="ctr"/>
           <a:lstStyle/>
           <a:p>
-            <a:pPr algn="ctr" indent="0" marL="0">
+            <a:pPr marL="0" indent="0" algn="ctr">
               <a:buNone/>
             </a:pPr>
             <a:r>
@@ -6429,7 +6192,7 @@
           <a:bodyPr wrap="square" lIns="0" tIns="0" rIns="0" bIns="0" rtlCol="0" anchor="ctr"/>
           <a:lstStyle/>
           <a:p>
-            <a:pPr algn="ctr" indent="0" marL="0">
+            <a:pPr marL="0" indent="0" algn="ctr">
               <a:buNone/>
             </a:pPr>
             <a:r>
@@ -6460,6 +6223,7 @@
         <a:solidFill>
           <a:srgbClr val="0A0E1A"/>
         </a:solidFill>
+        <a:effectLst/>
       </p:bgPr>
     </p:bg>
     <p:spTree>
@@ -6522,7 +6286,7 @@
           <a:bodyPr wrap="square" lIns="0" tIns="0" rIns="0" bIns="0" rtlCol="0" anchor="ctr"/>
           <a:lstStyle/>
           <a:p>
-            <a:pPr indent="0" marL="0">
+            <a:pPr marL="0" indent="0">
               <a:buNone/>
             </a:pPr>
             <a:r>
@@ -6586,7 +6350,7 @@
           <a:bodyPr wrap="square" lIns="0" tIns="0" rIns="0" bIns="0" rtlCol="0" anchor="ctr"/>
           <a:lstStyle/>
           <a:p>
-            <a:pPr algn="ctr" indent="0" marL="0">
+            <a:pPr marL="0" indent="0" algn="ctr">
               <a:buNone/>
             </a:pPr>
             <a:r>
@@ -6625,7 +6389,7 @@
           <a:bodyPr wrap="square" lIns="0" tIns="0" rIns="0" bIns="0" rtlCol="0" anchor="ctr"/>
           <a:lstStyle/>
           <a:p>
-            <a:pPr indent="0" marL="0">
+            <a:pPr marL="0" indent="0">
               <a:buNone/>
             </a:pPr>
             <a:r>
@@ -6640,9 +6404,6 @@
               <a:t>ISS (ZARYA)
 </a:t>
             </a:r>
-            <a:pPr indent="0" marL="0">
-              <a:buNone/>
-            </a:pPr>
             <a:r>
               <a:rPr lang="en-US" sz="750" dirty="0">
                 <a:solidFill>
@@ -6655,9 +6416,6 @@
               <a:t>1 25544U 98067A   26080.50000000  .00001764  00000-0  40058-4 0  9993
 </a:t>
             </a:r>
-            <a:pPr indent="0" marL="0">
-              <a:buNone/>
-            </a:pPr>
             <a:r>
               <a:rPr lang="en-US" sz="750" dirty="0">
                 <a:solidFill>
@@ -6744,7 +6502,7 @@
           <a:bodyPr wrap="square" lIns="0" tIns="0" rIns="0" bIns="0" rtlCol="0" anchor="ctr"/>
           <a:lstStyle/>
           <a:p>
-            <a:pPr algn="ctr" indent="0" marL="0">
+            <a:pPr marL="0" indent="0" algn="ctr">
               <a:buNone/>
             </a:pPr>
             <a:r>
@@ -6780,7 +6538,7 @@
           <a:bodyPr wrap="square" lIns="0" tIns="0" rIns="0" bIns="0" rtlCol="0" anchor="ctr"/>
           <a:lstStyle/>
           <a:p>
-            <a:pPr indent="0" marL="0">
+            <a:pPr marL="0" indent="0">
               <a:buNone/>
             </a:pPr>
             <a:r>
@@ -6819,7 +6577,7 @@
           <a:bodyPr wrap="square" lIns="0" tIns="0" rIns="0" bIns="0" rtlCol="0" anchor="ctr"/>
           <a:lstStyle/>
           <a:p>
-            <a:pPr indent="0" marL="0">
+            <a:pPr marL="0" indent="0">
               <a:buNone/>
             </a:pPr>
             <a:r>
@@ -6836,7 +6594,7 @@
             <a:endParaRPr lang="en-US" sz="900" dirty="0"/>
           </a:p>
           <a:p>
-            <a:pPr indent="0" marL="0">
+            <a:pPr marL="0" indent="0">
               <a:buNone/>
             </a:pPr>
             <a:r>
@@ -6853,7 +6611,7 @@
             <a:endParaRPr lang="en-US" sz="900" dirty="0"/>
           </a:p>
           <a:p>
-            <a:pPr indent="0" marL="0">
+            <a:pPr marL="0" indent="0">
               <a:buNone/>
             </a:pPr>
             <a:r>
@@ -6942,7 +6700,7 @@
           <a:bodyPr wrap="square" lIns="0" tIns="0" rIns="0" bIns="0" rtlCol="0" anchor="ctr"/>
           <a:lstStyle/>
           <a:p>
-            <a:pPr algn="ctr" indent="0" marL="0">
+            <a:pPr marL="0" indent="0" algn="ctr">
               <a:buNone/>
             </a:pPr>
             <a:r>
@@ -6978,7 +6736,7 @@
           <a:bodyPr wrap="square" lIns="0" tIns="0" rIns="0" bIns="0" rtlCol="0" anchor="ctr"/>
           <a:lstStyle/>
           <a:p>
-            <a:pPr indent="0" marL="0">
+            <a:pPr marL="0" indent="0">
               <a:buNone/>
             </a:pPr>
             <a:r>
@@ -7017,7 +6775,7 @@
           <a:bodyPr wrap="square" lIns="0" tIns="0" rIns="0" bIns="0" rtlCol="0" anchor="ctr"/>
           <a:lstStyle/>
           <a:p>
-            <a:pPr indent="0" marL="0">
+            <a:pPr marL="0" indent="0">
               <a:buNone/>
             </a:pPr>
             <a:r>
@@ -7034,7 +6792,7 @@
             <a:endParaRPr lang="en-US" sz="900" dirty="0"/>
           </a:p>
           <a:p>
-            <a:pPr indent="0" marL="0">
+            <a:pPr marL="0" indent="0">
               <a:buNone/>
             </a:pPr>
             <a:r>
@@ -7051,7 +6809,7 @@
             <a:endParaRPr lang="en-US" sz="900" dirty="0"/>
           </a:p>
           <a:p>
-            <a:pPr indent="0" marL="0">
+            <a:pPr marL="0" indent="0">
               <a:buNone/>
             </a:pPr>
             <a:r>
@@ -7140,7 +6898,7 @@
           <a:bodyPr wrap="square" lIns="0" tIns="0" rIns="0" bIns="0" rtlCol="0" anchor="ctr"/>
           <a:lstStyle/>
           <a:p>
-            <a:pPr algn="ctr" indent="0" marL="0">
+            <a:pPr marL="0" indent="0" algn="ctr">
               <a:buNone/>
             </a:pPr>
             <a:r>
@@ -7176,7 +6934,7 @@
           <a:bodyPr wrap="square" lIns="0" tIns="0" rIns="0" bIns="0" rtlCol="0" anchor="ctr"/>
           <a:lstStyle/>
           <a:p>
-            <a:pPr indent="0" marL="0">
+            <a:pPr marL="0" indent="0">
               <a:buNone/>
             </a:pPr>
             <a:r>
@@ -7215,7 +6973,7 @@
           <a:bodyPr wrap="square" lIns="0" tIns="0" rIns="0" bIns="0" rtlCol="0" anchor="ctr"/>
           <a:lstStyle/>
           <a:p>
-            <a:pPr indent="0" marL="0">
+            <a:pPr marL="0" indent="0">
               <a:buNone/>
             </a:pPr>
             <a:r>
@@ -7232,7 +6990,7 @@
             <a:endParaRPr lang="en-US" sz="900" dirty="0"/>
           </a:p>
           <a:p>
-            <a:pPr indent="0" marL="0">
+            <a:pPr marL="0" indent="0">
               <a:buNone/>
             </a:pPr>
             <a:r>
@@ -7249,7 +7007,7 @@
             <a:endParaRPr lang="en-US" sz="900" dirty="0"/>
           </a:p>
           <a:p>
-            <a:pPr indent="0" marL="0">
+            <a:pPr marL="0" indent="0">
               <a:buNone/>
             </a:pPr>
             <a:r>
@@ -7338,7 +7096,7 @@
           <a:bodyPr wrap="square" lIns="0" tIns="0" rIns="0" bIns="0" rtlCol="0" anchor="ctr"/>
           <a:lstStyle/>
           <a:p>
-            <a:pPr algn="ctr" indent="0" marL="0">
+            <a:pPr marL="0" indent="0" algn="ctr">
               <a:buNone/>
             </a:pPr>
             <a:r>
@@ -7374,7 +7132,7 @@
           <a:bodyPr wrap="square" lIns="0" tIns="0" rIns="0" bIns="0" rtlCol="0" anchor="ctr"/>
           <a:lstStyle/>
           <a:p>
-            <a:pPr indent="0" marL="0">
+            <a:pPr marL="0" indent="0">
               <a:buNone/>
             </a:pPr>
             <a:r>
@@ -7413,7 +7171,7 @@
           <a:bodyPr wrap="square" lIns="0" tIns="0" rIns="0" bIns="0" rtlCol="0" anchor="ctr"/>
           <a:lstStyle/>
           <a:p>
-            <a:pPr indent="0" marL="0">
+            <a:pPr marL="0" indent="0">
               <a:buNone/>
             </a:pPr>
             <a:r>
@@ -7430,7 +7188,7 @@
             <a:endParaRPr lang="en-US" sz="900" dirty="0"/>
           </a:p>
           <a:p>
-            <a:pPr indent="0" marL="0">
+            <a:pPr marL="0" indent="0">
               <a:buNone/>
             </a:pPr>
             <a:r>
@@ -7447,7 +7205,7 @@
             <a:endParaRPr lang="en-US" sz="900" dirty="0"/>
           </a:p>
           <a:p>
-            <a:pPr indent="0" marL="0">
+            <a:pPr marL="0" indent="0">
               <a:buNone/>
             </a:pPr>
             <a:r>
@@ -7559,7 +7317,7 @@
           <a:bodyPr wrap="square" lIns="0" tIns="0" rIns="0" bIns="0" rtlCol="0" anchor="ctr"/>
           <a:lstStyle/>
           <a:p>
-            <a:pPr indent="0" marL="0">
+            <a:pPr marL="0" indent="0">
               <a:buNone/>
             </a:pPr>
             <a:r>
@@ -7598,7 +7356,7 @@
           <a:bodyPr wrap="square" lIns="0" tIns="0" rIns="0" bIns="0" rtlCol="0" anchor="ctr"/>
           <a:lstStyle/>
           <a:p>
-            <a:pPr indent="0" marL="0">
+            <a:pPr marL="0" indent="0">
               <a:buNone/>
             </a:pPr>
             <a:r>
@@ -7612,9 +7370,6 @@
               </a:rPr>
               <a:t>▸  </a:t>
             </a:r>
-            <a:pPr indent="0" marL="0">
-              <a:buNone/>
-            </a:pPr>
             <a:r>
               <a:rPr lang="en-US" sz="1000" dirty="0">
                 <a:solidFill>
@@ -7651,7 +7406,7 @@
           <a:bodyPr wrap="square" lIns="0" tIns="0" rIns="0" bIns="0" rtlCol="0" anchor="ctr"/>
           <a:lstStyle/>
           <a:p>
-            <a:pPr indent="0" marL="0">
+            <a:pPr marL="0" indent="0">
               <a:buNone/>
             </a:pPr>
             <a:r>
@@ -7665,9 +7420,6 @@
               </a:rPr>
               <a:t>▸  </a:t>
             </a:r>
-            <a:pPr indent="0" marL="0">
-              <a:buNone/>
-            </a:pPr>
             <a:r>
               <a:rPr lang="en-US" sz="1000" dirty="0">
                 <a:solidFill>
@@ -7704,7 +7456,7 @@
           <a:bodyPr wrap="square" lIns="0" tIns="0" rIns="0" bIns="0" rtlCol="0" anchor="ctr"/>
           <a:lstStyle/>
           <a:p>
-            <a:pPr indent="0" marL="0">
+            <a:pPr marL="0" indent="0">
               <a:buNone/>
             </a:pPr>
             <a:r>
@@ -7718,9 +7470,6 @@
               </a:rPr>
               <a:t>▸  </a:t>
             </a:r>
-            <a:pPr indent="0" marL="0">
-              <a:buNone/>
-            </a:pPr>
             <a:r>
               <a:rPr lang="en-US" sz="1000" dirty="0">
                 <a:solidFill>
@@ -7757,7 +7506,7 @@
           <a:bodyPr wrap="square" lIns="0" tIns="0" rIns="0" bIns="0" rtlCol="0" anchor="ctr"/>
           <a:lstStyle/>
           <a:p>
-            <a:pPr indent="0" marL="0">
+            <a:pPr marL="0" indent="0">
               <a:buNone/>
             </a:pPr>
             <a:r>
@@ -7771,9 +7520,6 @@
               </a:rPr>
               <a:t>▸  </a:t>
             </a:r>
-            <a:pPr indent="0" marL="0">
-              <a:buNone/>
-            </a:pPr>
             <a:r>
               <a:rPr lang="en-US" sz="1000" dirty="0">
                 <a:solidFill>
@@ -7805,6 +7551,7 @@
         <a:solidFill>
           <a:srgbClr val="0A0E1A"/>
         </a:solidFill>
+        <a:effectLst/>
       </p:bgPr>
     </p:bg>
     <p:spTree>
@@ -7867,7 +7614,7 @@
           <a:bodyPr wrap="square" lIns="0" tIns="0" rIns="0" bIns="0" rtlCol="0" anchor="ctr"/>
           <a:lstStyle/>
           <a:p>
-            <a:pPr indent="0" marL="0">
+            <a:pPr marL="0" indent="0">
               <a:buNone/>
             </a:pPr>
             <a:r>
@@ -7931,7 +7678,7 @@
           <a:bodyPr wrap="square" lIns="0" tIns="0" rIns="0" bIns="0" rtlCol="0" anchor="ctr"/>
           <a:lstStyle/>
           <a:p>
-            <a:pPr algn="ctr" indent="0" marL="0">
+            <a:pPr marL="0" indent="0" algn="ctr">
               <a:buNone/>
             </a:pPr>
             <a:r>
@@ -7970,7 +7717,7 @@
           <a:bodyPr wrap="square" lIns="0" tIns="0" rIns="0" bIns="0" rtlCol="0" anchor="ctr"/>
           <a:lstStyle/>
           <a:p>
-            <a:pPr algn="ctr" indent="0" marL="0">
+            <a:pPr marL="0" indent="0" algn="ctr">
               <a:buNone/>
             </a:pPr>
             <a:r>
@@ -8034,7 +7781,7 @@
           <a:bodyPr wrap="square" lIns="0" tIns="0" rIns="0" bIns="0" rtlCol="0" anchor="ctr"/>
           <a:lstStyle/>
           <a:p>
-            <a:pPr algn="ctr" indent="0" marL="0">
+            <a:pPr marL="0" indent="0" algn="ctr">
               <a:buNone/>
             </a:pPr>
             <a:r>
@@ -8073,7 +7820,7 @@
           <a:bodyPr wrap="square" lIns="0" tIns="0" rIns="0" bIns="0" rtlCol="0" anchor="ctr"/>
           <a:lstStyle/>
           <a:p>
-            <a:pPr algn="ctr" indent="0" marL="0">
+            <a:pPr marL="0" indent="0" algn="ctr">
               <a:buNone/>
             </a:pPr>
             <a:r>
@@ -8137,7 +7884,7 @@
           <a:bodyPr wrap="square" lIns="0" tIns="0" rIns="0" bIns="0" rtlCol="0" anchor="ctr"/>
           <a:lstStyle/>
           <a:p>
-            <a:pPr algn="ctr" indent="0" marL="0">
+            <a:pPr marL="0" indent="0" algn="ctr">
               <a:buNone/>
             </a:pPr>
             <a:r>
@@ -8176,7 +7923,7 @@
           <a:bodyPr wrap="square" lIns="0" tIns="0" rIns="0" bIns="0" rtlCol="0" anchor="ctr"/>
           <a:lstStyle/>
           <a:p>
-            <a:pPr algn="ctr" indent="0" marL="0">
+            <a:pPr marL="0" indent="0" algn="ctr">
               <a:buNone/>
             </a:pPr>
             <a:r>
@@ -8240,7 +7987,7 @@
           <a:bodyPr wrap="square" lIns="0" tIns="0" rIns="0" bIns="0" rtlCol="0" anchor="ctr"/>
           <a:lstStyle/>
           <a:p>
-            <a:pPr algn="ctr" indent="0" marL="0">
+            <a:pPr marL="0" indent="0" algn="ctr">
               <a:buNone/>
             </a:pPr>
             <a:r>
@@ -8279,7 +8026,7 @@
           <a:bodyPr wrap="square" lIns="0" tIns="0" rIns="0" bIns="0" rtlCol="0" anchor="ctr"/>
           <a:lstStyle/>
           <a:p>
-            <a:pPr algn="ctr" indent="0" marL="0">
+            <a:pPr marL="0" indent="0" algn="ctr">
               <a:buNone/>
             </a:pPr>
             <a:r>
@@ -8318,7 +8065,7 @@
           <a:bodyPr wrap="square" lIns="0" tIns="0" rIns="0" bIns="0" rtlCol="0" anchor="ctr"/>
           <a:lstStyle/>
           <a:p>
-            <a:pPr indent="0" marL="0">
+            <a:pPr marL="0" indent="0">
               <a:buNone/>
             </a:pPr>
             <a:r>
@@ -8357,7 +8104,7 @@
           <a:bodyPr wrap="square" lIns="0" tIns="0" rIns="0" bIns="0" rtlCol="0" anchor="ctr"/>
           <a:lstStyle/>
           <a:p>
-            <a:pPr indent="0" marL="0">
+            <a:pPr marL="0" indent="0">
               <a:buNone/>
             </a:pPr>
             <a:r>
@@ -8396,7 +8143,7 @@
           <a:bodyPr wrap="square" lIns="0" tIns="0" rIns="0" bIns="0" rtlCol="0" anchor="ctr"/>
           <a:lstStyle/>
           <a:p>
-            <a:pPr indent="0" marL="0">
+            <a:pPr marL="0" indent="0">
               <a:buNone/>
             </a:pPr>
             <a:r>
@@ -8410,9 +8157,6 @@
               </a:rPr>
               <a:t>✓  </a:t>
             </a:r>
-            <a:pPr indent="0" marL="0">
-              <a:buNone/>
-            </a:pPr>
             <a:r>
               <a:rPr lang="en-US" sz="1000" dirty="0">
                 <a:solidFill>
@@ -8449,7 +8193,7 @@
           <a:bodyPr wrap="square" lIns="0" tIns="0" rIns="0" bIns="0" rtlCol="0" anchor="ctr"/>
           <a:lstStyle/>
           <a:p>
-            <a:pPr indent="0" marL="0">
+            <a:pPr marL="0" indent="0">
               <a:buNone/>
             </a:pPr>
             <a:r>
@@ -8463,9 +8207,6 @@
               </a:rPr>
               <a:t>✓  </a:t>
             </a:r>
-            <a:pPr indent="0" marL="0">
-              <a:buNone/>
-            </a:pPr>
             <a:r>
               <a:rPr lang="en-US" sz="1000" dirty="0">
                 <a:solidFill>
@@ -8502,7 +8243,7 @@
           <a:bodyPr wrap="square" lIns="0" tIns="0" rIns="0" bIns="0" rtlCol="0" anchor="ctr"/>
           <a:lstStyle/>
           <a:p>
-            <a:pPr indent="0" marL="0">
+            <a:pPr marL="0" indent="0">
               <a:buNone/>
             </a:pPr>
             <a:r>
@@ -8516,9 +8257,6 @@
               </a:rPr>
               <a:t>✓  </a:t>
             </a:r>
-            <a:pPr indent="0" marL="0">
-              <a:buNone/>
-            </a:pPr>
             <a:r>
               <a:rPr lang="en-US" sz="1000" dirty="0">
                 <a:solidFill>
@@ -8555,7 +8293,7 @@
           <a:bodyPr wrap="square" lIns="0" tIns="0" rIns="0" bIns="0" rtlCol="0" anchor="ctr"/>
           <a:lstStyle/>
           <a:p>
-            <a:pPr indent="0" marL="0">
+            <a:pPr marL="0" indent="0">
               <a:buNone/>
             </a:pPr>
             <a:r>
@@ -8569,9 +8307,6 @@
               </a:rPr>
               <a:t>✓  </a:t>
             </a:r>
-            <a:pPr indent="0" marL="0">
-              <a:buNone/>
-            </a:pPr>
             <a:r>
               <a:rPr lang="en-US" sz="1000" dirty="0">
                 <a:solidFill>
@@ -8608,7 +8343,7 @@
           <a:bodyPr wrap="square" lIns="0" tIns="0" rIns="0" bIns="0" rtlCol="0" anchor="ctr"/>
           <a:lstStyle/>
           <a:p>
-            <a:pPr indent="0" marL="0">
+            <a:pPr marL="0" indent="0">
               <a:buNone/>
             </a:pPr>
             <a:r>
@@ -8622,9 +8357,6 @@
               </a:rPr>
               <a:t>✓  </a:t>
             </a:r>
-            <a:pPr indent="0" marL="0">
-              <a:buNone/>
-            </a:pPr>
             <a:r>
               <a:rPr lang="en-US" sz="1000" dirty="0">
                 <a:solidFill>
@@ -8661,7 +8393,7 @@
           <a:bodyPr wrap="square" lIns="0" tIns="0" rIns="0" bIns="0" rtlCol="0" anchor="ctr"/>
           <a:lstStyle/>
           <a:p>
-            <a:pPr indent="0" marL="0">
+            <a:pPr marL="0" indent="0">
               <a:buNone/>
             </a:pPr>
             <a:r>
@@ -8675,9 +8407,6 @@
               </a:rPr>
               <a:t>✓  </a:t>
             </a:r>
-            <a:pPr indent="0" marL="0">
-              <a:buNone/>
-            </a:pPr>
             <a:r>
               <a:rPr lang="en-US" sz="1000" dirty="0">
                 <a:solidFill>
@@ -8714,7 +8443,7 @@
           <a:bodyPr wrap="square" lIns="0" tIns="0" rIns="0" bIns="0" rtlCol="0" anchor="ctr"/>
           <a:lstStyle/>
           <a:p>
-            <a:pPr indent="0" marL="0">
+            <a:pPr marL="0" indent="0">
               <a:buNone/>
             </a:pPr>
             <a:r>
@@ -8728,9 +8457,6 @@
               </a:rPr>
               <a:t>→  </a:t>
             </a:r>
-            <a:pPr indent="0" marL="0">
-              <a:buNone/>
-            </a:pPr>
             <a:r>
               <a:rPr lang="en-US" sz="1000" dirty="0">
                 <a:solidFill>
@@ -8767,7 +8493,7 @@
           <a:bodyPr wrap="square" lIns="0" tIns="0" rIns="0" bIns="0" rtlCol="0" anchor="ctr"/>
           <a:lstStyle/>
           <a:p>
-            <a:pPr indent="0" marL="0">
+            <a:pPr marL="0" indent="0">
               <a:buNone/>
             </a:pPr>
             <a:r>
@@ -8781,9 +8507,6 @@
               </a:rPr>
               <a:t>→  </a:t>
             </a:r>
-            <a:pPr indent="0" marL="0">
-              <a:buNone/>
-            </a:pPr>
             <a:r>
               <a:rPr lang="en-US" sz="1000" dirty="0">
                 <a:solidFill>
@@ -8820,7 +8543,7 @@
           <a:bodyPr wrap="square" lIns="0" tIns="0" rIns="0" bIns="0" rtlCol="0" anchor="ctr"/>
           <a:lstStyle/>
           <a:p>
-            <a:pPr indent="0" marL="0">
+            <a:pPr marL="0" indent="0">
               <a:buNone/>
             </a:pPr>
             <a:r>
@@ -8834,9 +8557,6 @@
               </a:rPr>
               <a:t>→  </a:t>
             </a:r>
-            <a:pPr indent="0" marL="0">
-              <a:buNone/>
-            </a:pPr>
             <a:r>
               <a:rPr lang="en-US" sz="1000" dirty="0">
                 <a:solidFill>
@@ -8873,7 +8593,7 @@
           <a:bodyPr wrap="square" lIns="0" tIns="0" rIns="0" bIns="0" rtlCol="0" anchor="ctr"/>
           <a:lstStyle/>
           <a:p>
-            <a:pPr indent="0" marL="0">
+            <a:pPr marL="0" indent="0">
               <a:buNone/>
             </a:pPr>
             <a:r>
@@ -8887,9 +8607,6 @@
               </a:rPr>
               <a:t>→  </a:t>
             </a:r>
-            <a:pPr indent="0" marL="0">
-              <a:buNone/>
-            </a:pPr>
             <a:r>
               <a:rPr lang="en-US" sz="1000" dirty="0">
                 <a:solidFill>
@@ -8926,7 +8643,7 @@
           <a:bodyPr wrap="square" lIns="0" tIns="0" rIns="0" bIns="0" rtlCol="0" anchor="ctr"/>
           <a:lstStyle/>
           <a:p>
-            <a:pPr indent="0" marL="0">
+            <a:pPr marL="0" indent="0">
               <a:buNone/>
             </a:pPr>
             <a:r>
@@ -8940,9 +8657,6 @@
               </a:rPr>
               <a:t>→  </a:t>
             </a:r>
-            <a:pPr indent="0" marL="0">
-              <a:buNone/>
-            </a:pPr>
             <a:r>
               <a:rPr lang="en-US" sz="1000" dirty="0">
                 <a:solidFill>
@@ -8979,7 +8693,7 @@
           <a:bodyPr wrap="square" lIns="0" tIns="0" rIns="0" bIns="0" rtlCol="0" anchor="ctr"/>
           <a:lstStyle/>
           <a:p>
-            <a:pPr indent="0" marL="0">
+            <a:pPr marL="0" indent="0">
               <a:buNone/>
             </a:pPr>
             <a:r>
@@ -8993,9 +8707,6 @@
               </a:rPr>
               <a:t>→  </a:t>
             </a:r>
-            <a:pPr indent="0" marL="0">
-              <a:buNone/>
-            </a:pPr>
             <a:r>
               <a:rPr lang="en-US" sz="1000" dirty="0">
                 <a:solidFill>
@@ -9057,7 +8768,7 @@
           <a:bodyPr wrap="square" lIns="0" tIns="0" rIns="0" bIns="0" rtlCol="0" anchor="ctr"/>
           <a:lstStyle/>
           <a:p>
-            <a:pPr algn="ctr" indent="0" marL="0">
+            <a:pPr marL="0" indent="0" algn="ctr">
               <a:buNone/>
             </a:pPr>
             <a:r>
@@ -9069,6 +8780,74 @@
               <a:t>РНИИРС · Ростов-на-Дону · 2026  |  sourcecraft.dev</a:t>
             </a:r>
             <a:endParaRPr lang="en-US" sz="1000" dirty="0"/>
+          </a:p>
+        </p:txBody>
+      </p:sp>
+      <p:pic>
+        <p:nvPicPr>
+          <p:cNvPr id="32" name="Рисунок 31"/>
+          <p:cNvPicPr>
+            <a:picLocks noChangeAspect="1"/>
+          </p:cNvPicPr>
+          <p:nvPr/>
+        </p:nvPicPr>
+        <p:blipFill>
+          <a:blip r:embed="rId3">
+            <a:extLst>
+              <a:ext uri="{28A0092B-C50C-407E-A947-70E740481C1C}">
+                <a14:useLocalDpi xmlns:a14="http://schemas.microsoft.com/office/drawing/2010/main" val="0"/>
+              </a:ext>
+            </a:extLst>
+          </a:blip>
+          <a:stretch>
+            <a:fillRect/>
+          </a:stretch>
+        </p:blipFill>
+        <p:spPr>
+          <a:xfrm>
+            <a:off x="7143750" y="1996440"/>
+            <a:ext cx="1769364" cy="1769364"/>
+          </a:xfrm>
+          <a:prstGeom prst="rect">
+            <a:avLst/>
+          </a:prstGeom>
+        </p:spPr>
+      </p:pic>
+      <p:sp>
+        <p:nvSpPr>
+          <p:cNvPr id="33" name="TextBox 32"/>
+          <p:cNvSpPr txBox="1"/>
+          <p:nvPr/>
+        </p:nvSpPr>
+        <p:spPr>
+          <a:xfrm>
+            <a:off x="7407154" y="3765542"/>
+            <a:ext cx="1279646" cy="369332"/>
+          </a:xfrm>
+          <a:prstGeom prst="rect">
+            <a:avLst/>
+          </a:prstGeom>
+          <a:noFill/>
+        </p:spPr>
+        <p:txBody>
+          <a:bodyPr wrap="none" rtlCol="0">
+            <a:spAutoFit/>
+          </a:bodyPr>
+          <a:lstStyle/>
+          <a:p>
+            <a:r>
+              <a:rPr lang="en-US" dirty="0" smtClean="0">
+                <a:solidFill>
+                  <a:schemeClr val="bg1"/>
+                </a:solidFill>
+              </a:rPr>
+              <a:t>SourceCraft</a:t>
+            </a:r>
+            <a:endParaRPr lang="ru-RU" dirty="0">
+              <a:solidFill>
+                <a:schemeClr val="bg1"/>
+              </a:solidFill>
+            </a:endParaRPr>
           </a:p>
         </p:txBody>
       </p:sp>
@@ -9373,4 +9152,265 @@
     </a:ext>
   </a:extLst>
 </a:theme>
+</file>
+
+<file path=ppt/theme/theme2.xml><?xml version="1.0" encoding="utf-8"?>
+<a:theme xmlns:a="http://schemas.openxmlformats.org/drawingml/2006/main" name="Тема Office">
+  <a:themeElements>
+    <a:clrScheme name="Стандартная">
+      <a:dk1>
+        <a:sysClr val="windowText" lastClr="000000"/>
+      </a:dk1>
+      <a:lt1>
+        <a:sysClr val="window" lastClr="FFFFFF"/>
+      </a:lt1>
+      <a:dk2>
+        <a:srgbClr val="44546A"/>
+      </a:dk2>
+      <a:lt2>
+        <a:srgbClr val="E7E6E6"/>
+      </a:lt2>
+      <a:accent1>
+        <a:srgbClr val="5B9BD5"/>
+      </a:accent1>
+      <a:accent2>
+        <a:srgbClr val="ED7D31"/>
+      </a:accent2>
+      <a:accent3>
+        <a:srgbClr val="A5A5A5"/>
+      </a:accent3>
+      <a:accent4>
+        <a:srgbClr val="FFC000"/>
+      </a:accent4>
+      <a:accent5>
+        <a:srgbClr val="4472C4"/>
+      </a:accent5>
+      <a:accent6>
+        <a:srgbClr val="70AD47"/>
+      </a:accent6>
+      <a:hlink>
+        <a:srgbClr val="0563C1"/>
+      </a:hlink>
+      <a:folHlink>
+        <a:srgbClr val="954F72"/>
+      </a:folHlink>
+    </a:clrScheme>
+    <a:fontScheme name="Стандартная">
+      <a:majorFont>
+        <a:latin typeface="Calibri Light" panose="020F0302020204030204"/>
+        <a:ea typeface=""/>
+        <a:cs typeface=""/>
+        <a:font script="Jpan" typeface="游ゴシック Light"/>
+        <a:font script="Hang" typeface="맑은 고딕"/>
+        <a:font script="Hans" typeface="等线 Light"/>
+        <a:font script="Hant" typeface="新細明體"/>
+        <a:font script="Arab" typeface="Times New Roman"/>
+        <a:font script="Hebr" typeface="Times New Roman"/>
+        <a:font script="Thai" typeface="Angsana New"/>
+        <a:font script="Ethi" typeface="Nyala"/>
+        <a:font script="Beng" typeface="Vrinda"/>
+        <a:font script="Gujr" typeface="Shruti"/>
+        <a:font script="Khmr" typeface="MoolBoran"/>
+        <a:font script="Knda" typeface="Tunga"/>
+        <a:font script="Guru" typeface="Raavi"/>
+        <a:font script="Cans" typeface="Euphemia"/>
+        <a:font script="Cher" typeface="Plantagenet Cherokee"/>
+        <a:font script="Yiii" typeface="Microsoft Yi Baiti"/>
+        <a:font script="Tibt" typeface="Microsoft Himalaya"/>
+        <a:font script="Thaa" typeface="MV Boli"/>
+        <a:font script="Deva" typeface="Mangal"/>
+        <a:font script="Telu" typeface="Gautami"/>
+        <a:font script="Taml" typeface="Latha"/>
+        <a:font script="Syrc" typeface="Estrangelo Edessa"/>
+        <a:font script="Orya" typeface="Kalinga"/>
+        <a:font script="Mlym" typeface="Kartika"/>
+        <a:font script="Laoo" typeface="DokChampa"/>
+        <a:font script="Sinh" typeface="Iskoola Pota"/>
+        <a:font script="Mong" typeface="Mongolian Baiti"/>
+        <a:font script="Viet" typeface="Times New Roman"/>
+        <a:font script="Uigh" typeface="Microsoft Uighur"/>
+        <a:font script="Geor" typeface="Sylfaen"/>
+      </a:majorFont>
+      <a:minorFont>
+        <a:latin typeface="Calibri" panose="020F0502020204030204"/>
+        <a:ea typeface=""/>
+        <a:cs typeface=""/>
+        <a:font script="Jpan" typeface="游ゴシック"/>
+        <a:font script="Hang" typeface="맑은 고딕"/>
+        <a:font script="Hans" typeface="等线"/>
+        <a:font script="Hant" typeface="新細明體"/>
+        <a:font script="Arab" typeface="Arial"/>
+        <a:font script="Hebr" typeface="Arial"/>
+        <a:font script="Thai" typeface="Cordia New"/>
+        <a:font script="Ethi" typeface="Nyala"/>
+        <a:font script="Beng" typeface="Vrinda"/>
+        <a:font script="Gujr" typeface="Shruti"/>
+        <a:font script="Khmr" typeface="DaunPenh"/>
+        <a:font script="Knda" typeface="Tunga"/>
+        <a:font script="Guru" typeface="Raavi"/>
+        <a:font script="Cans" typeface="Euphemia"/>
+        <a:font script="Cher" typeface="Plantagenet Cherokee"/>
+        <a:font script="Yiii" typeface="Microsoft Yi Baiti"/>
+        <a:font script="Tibt" typeface="Microsoft Himalaya"/>
+        <a:font script="Thaa" typeface="MV Boli"/>
+        <a:font script="Deva" typeface="Mangal"/>
+        <a:font script="Telu" typeface="Gautami"/>
+        <a:font script="Taml" typeface="Latha"/>
+        <a:font script="Syrc" typeface="Estrangelo Edessa"/>
+        <a:font script="Orya" typeface="Kalinga"/>
+        <a:font script="Mlym" typeface="Kartika"/>
+        <a:font script="Laoo" typeface="DokChampa"/>
+        <a:font script="Sinh" typeface="Iskoola Pota"/>
+        <a:font script="Mong" typeface="Mongolian Baiti"/>
+        <a:font script="Viet" typeface="Arial"/>
+        <a:font script="Uigh" typeface="Microsoft Uighur"/>
+        <a:font script="Geor" typeface="Sylfaen"/>
+      </a:minorFont>
+    </a:fontScheme>
+    <a:fmtScheme name="Стандартная">
+      <a:fillStyleLst>
+        <a:solidFill>
+          <a:schemeClr val="phClr"/>
+        </a:solidFill>
+        <a:gradFill rotWithShape="1">
+          <a:gsLst>
+            <a:gs pos="0">
+              <a:schemeClr val="phClr">
+                <a:lumMod val="110000"/>
+                <a:satMod val="105000"/>
+                <a:tint val="67000"/>
+              </a:schemeClr>
+            </a:gs>
+            <a:gs pos="50000">
+              <a:schemeClr val="phClr">
+                <a:lumMod val="105000"/>
+                <a:satMod val="103000"/>
+                <a:tint val="73000"/>
+              </a:schemeClr>
+            </a:gs>
+            <a:gs pos="100000">
+              <a:schemeClr val="phClr">
+                <a:lumMod val="105000"/>
+                <a:satMod val="109000"/>
+                <a:tint val="81000"/>
+              </a:schemeClr>
+            </a:gs>
+          </a:gsLst>
+          <a:lin ang="5400000" scaled="0"/>
+        </a:gradFill>
+        <a:gradFill rotWithShape="1">
+          <a:gsLst>
+            <a:gs pos="0">
+              <a:schemeClr val="phClr">
+                <a:satMod val="103000"/>
+                <a:lumMod val="102000"/>
+                <a:tint val="94000"/>
+              </a:schemeClr>
+            </a:gs>
+            <a:gs pos="50000">
+              <a:schemeClr val="phClr">
+                <a:satMod val="110000"/>
+                <a:lumMod val="100000"/>
+                <a:shade val="100000"/>
+              </a:schemeClr>
+            </a:gs>
+            <a:gs pos="100000">
+              <a:schemeClr val="phClr">
+                <a:lumMod val="99000"/>
+                <a:satMod val="120000"/>
+                <a:shade val="78000"/>
+              </a:schemeClr>
+            </a:gs>
+          </a:gsLst>
+          <a:lin ang="5400000" scaled="0"/>
+        </a:gradFill>
+      </a:fillStyleLst>
+      <a:lnStyleLst>
+        <a:ln w="6350" cap="flat" cmpd="sng" algn="ctr">
+          <a:solidFill>
+            <a:schemeClr val="phClr"/>
+          </a:solidFill>
+          <a:prstDash val="solid"/>
+          <a:miter lim="800000"/>
+        </a:ln>
+        <a:ln w="12700" cap="flat" cmpd="sng" algn="ctr">
+          <a:solidFill>
+            <a:schemeClr val="phClr"/>
+          </a:solidFill>
+          <a:prstDash val="solid"/>
+          <a:miter lim="800000"/>
+        </a:ln>
+        <a:ln w="19050" cap="flat" cmpd="sng" algn="ctr">
+          <a:solidFill>
+            <a:schemeClr val="phClr"/>
+          </a:solidFill>
+          <a:prstDash val="solid"/>
+          <a:miter lim="800000"/>
+        </a:ln>
+      </a:lnStyleLst>
+      <a:effectStyleLst>
+        <a:effectStyle>
+          <a:effectLst/>
+        </a:effectStyle>
+        <a:effectStyle>
+          <a:effectLst/>
+        </a:effectStyle>
+        <a:effectStyle>
+          <a:effectLst>
+            <a:outerShdw blurRad="57150" dist="19050" dir="5400000" algn="ctr" rotWithShape="0">
+              <a:srgbClr val="000000">
+                <a:alpha val="63000"/>
+              </a:srgbClr>
+            </a:outerShdw>
+          </a:effectLst>
+        </a:effectStyle>
+      </a:effectStyleLst>
+      <a:bgFillStyleLst>
+        <a:solidFill>
+          <a:schemeClr val="phClr"/>
+        </a:solidFill>
+        <a:solidFill>
+          <a:schemeClr val="phClr">
+            <a:tint val="95000"/>
+            <a:satMod val="170000"/>
+          </a:schemeClr>
+        </a:solidFill>
+        <a:gradFill rotWithShape="1">
+          <a:gsLst>
+            <a:gs pos="0">
+              <a:schemeClr val="phClr">
+                <a:tint val="93000"/>
+                <a:satMod val="150000"/>
+                <a:shade val="98000"/>
+                <a:lumMod val="102000"/>
+              </a:schemeClr>
+            </a:gs>
+            <a:gs pos="50000">
+              <a:schemeClr val="phClr">
+                <a:tint val="98000"/>
+                <a:satMod val="130000"/>
+                <a:shade val="90000"/>
+                <a:lumMod val="103000"/>
+              </a:schemeClr>
+            </a:gs>
+            <a:gs pos="100000">
+              <a:schemeClr val="phClr">
+                <a:shade val="63000"/>
+                <a:satMod val="120000"/>
+              </a:schemeClr>
+            </a:gs>
+          </a:gsLst>
+          <a:lin ang="5400000" scaled="0"/>
+        </a:gradFill>
+      </a:bgFillStyleLst>
+    </a:fmtScheme>
+  </a:themeElements>
+  <a:objectDefaults/>
+  <a:extraClrSchemeLst/>
+  <a:extLst>
+    <a:ext uri="{05A4C25C-085E-4340-85A3-A5531E510DB2}">
+      <thm15:themeFamily xmlns:thm15="http://schemas.microsoft.com/office/thememl/2012/main" name="Office Theme" id="{62F939B6-93AF-4DB8-9C6B-D6C7DFDC589F}" vid="{4A3C46E8-61CC-4603-A589-7422A47A8E4A}"/>
+    </a:ext>
+  </a:extLst>
+</a:theme>
 </file>